--- a/slides/13_bayes_nets.pptx
+++ b/slides/13_bayes_nets.pptx
@@ -5,7 +5,7 @@
     <p:sldMasterId id="2147483672" r:id="rId1"/>
   </p:sldMasterIdLst>
   <p:notesMasterIdLst>
-    <p:notesMasterId r:id="rId50"/>
+    <p:notesMasterId r:id="rId49"/>
   </p:notesMasterIdLst>
   <p:sldIdLst>
     <p:sldId id="294" r:id="rId2"/>
@@ -38,24 +38,23 @@
     <p:sldId id="413" r:id="rId29"/>
     <p:sldId id="411" r:id="rId30"/>
     <p:sldId id="291" r:id="rId31"/>
-    <p:sldId id="419" r:id="rId32"/>
-    <p:sldId id="407" r:id="rId33"/>
-    <p:sldId id="305" r:id="rId34"/>
-    <p:sldId id="306" r:id="rId35"/>
-    <p:sldId id="307" r:id="rId36"/>
-    <p:sldId id="297" r:id="rId37"/>
-    <p:sldId id="298" r:id="rId38"/>
-    <p:sldId id="299" r:id="rId39"/>
-    <p:sldId id="317" r:id="rId40"/>
-    <p:sldId id="420" r:id="rId41"/>
-    <p:sldId id="318" r:id="rId42"/>
-    <p:sldId id="408" r:id="rId43"/>
-    <p:sldId id="319" r:id="rId44"/>
-    <p:sldId id="418" r:id="rId45"/>
-    <p:sldId id="320" r:id="rId46"/>
-    <p:sldId id="321" r:id="rId47"/>
-    <p:sldId id="409" r:id="rId48"/>
-    <p:sldId id="322" r:id="rId49"/>
+    <p:sldId id="407" r:id="rId32"/>
+    <p:sldId id="305" r:id="rId33"/>
+    <p:sldId id="306" r:id="rId34"/>
+    <p:sldId id="307" r:id="rId35"/>
+    <p:sldId id="297" r:id="rId36"/>
+    <p:sldId id="298" r:id="rId37"/>
+    <p:sldId id="299" r:id="rId38"/>
+    <p:sldId id="317" r:id="rId39"/>
+    <p:sldId id="421" r:id="rId40"/>
+    <p:sldId id="318" r:id="rId41"/>
+    <p:sldId id="408" r:id="rId42"/>
+    <p:sldId id="319" r:id="rId43"/>
+    <p:sldId id="418" r:id="rId44"/>
+    <p:sldId id="320" r:id="rId45"/>
+    <p:sldId id="321" r:id="rId46"/>
+    <p:sldId id="409" r:id="rId47"/>
+    <p:sldId id="322" r:id="rId48"/>
   </p:sldIdLst>
   <p:sldSz cx="9144000" cy="6858000" type="screen4x3"/>
   <p:notesSz cx="7315200" cy="9601200"/>
@@ -205,7 +204,6 @@
           <p14:sldIdLst>
             <p14:sldId id="411"/>
             <p14:sldId id="291"/>
-            <p14:sldId id="419"/>
             <p14:sldId id="407"/>
             <p14:sldId id="305"/>
             <p14:sldId id="306"/>
@@ -214,7 +212,11 @@
             <p14:sldId id="298"/>
             <p14:sldId id="299"/>
             <p14:sldId id="317"/>
-            <p14:sldId id="420"/>
+          </p14:sldIdLst>
+        </p14:section>
+        <p14:section name="Approximate Inference - Conditional Probabilites" id="{329082E0-0A32-42C4-85E7-807560F9DB9A}">
+          <p14:sldIdLst>
+            <p14:sldId id="421"/>
             <p14:sldId id="318"/>
             <p14:sldId id="408"/>
             <p14:sldId id="319"/>
@@ -3278,13 +3280,13 @@
       <dgm:prSet presAssocID="{649A3F61-A79A-4DC1-BF6F-1BDB364E3EFC}" presName="iconRect" presStyleLbl="node1" presStyleIdx="0" presStyleCnt="4"/>
       <dgm:spPr>
         <a:blipFill>
-          <a:blip xmlns:r="http://schemas.openxmlformats.org/officeDocument/2006/relationships" r:embed="rId1">
+          <a:blip xmlns:r="http://schemas.openxmlformats.org/officeDocument/2006/relationships">
             <a:extLst>
               <a:ext uri="{28A0092B-C50C-407E-A947-70E740481C1C}">
                 <a14:useLocalDpi xmlns:a14="http://schemas.microsoft.com/office/drawing/2010/main" val="0"/>
               </a:ext>
               <a:ext uri="{96DAC541-7B7A-43D3-8B79-37D633B846F1}">
-                <asvg:svgBlip xmlns:asvg="http://schemas.microsoft.com/office/drawing/2016/SVG/main" r:embed="rId2"/>
+                <asvg:svgBlip xmlns:asvg="http://schemas.microsoft.com/office/drawing/2016/SVG/main" r:embed="rId1"/>
               </a:ext>
             </a:extLst>
           </a:blip>
@@ -3331,13 +3333,13 @@
       <dgm:prSet presAssocID="{8FE378D1-9702-4D4B-9150-97630AB3F975}" presName="iconRect" presStyleLbl="node1" presStyleIdx="1" presStyleCnt="4"/>
       <dgm:spPr>
         <a:blipFill>
-          <a:blip xmlns:r="http://schemas.openxmlformats.org/officeDocument/2006/relationships" r:embed="rId3">
+          <a:blip xmlns:r="http://schemas.openxmlformats.org/officeDocument/2006/relationships">
             <a:extLst>
               <a:ext uri="{28A0092B-C50C-407E-A947-70E740481C1C}">
                 <a14:useLocalDpi xmlns:a14="http://schemas.microsoft.com/office/drawing/2010/main" val="0"/>
               </a:ext>
               <a:ext uri="{96DAC541-7B7A-43D3-8B79-37D633B846F1}">
-                <asvg:svgBlip xmlns:asvg="http://schemas.microsoft.com/office/drawing/2016/SVG/main" r:embed="rId4"/>
+                <asvg:svgBlip xmlns:asvg="http://schemas.microsoft.com/office/drawing/2016/SVG/main" r:embed="rId2"/>
               </a:ext>
             </a:extLst>
           </a:blip>
@@ -3384,13 +3386,13 @@
       <dgm:prSet presAssocID="{4449B95C-BD0D-4CEC-BD36-BCDEC20C9261}" presName="iconRect" presStyleLbl="node1" presStyleIdx="2" presStyleCnt="4"/>
       <dgm:spPr>
         <a:blipFill>
-          <a:blip xmlns:r="http://schemas.openxmlformats.org/officeDocument/2006/relationships" r:embed="rId5">
+          <a:blip xmlns:r="http://schemas.openxmlformats.org/officeDocument/2006/relationships">
             <a:extLst>
               <a:ext uri="{28A0092B-C50C-407E-A947-70E740481C1C}">
                 <a14:useLocalDpi xmlns:a14="http://schemas.microsoft.com/office/drawing/2010/main" val="0"/>
               </a:ext>
               <a:ext uri="{96DAC541-7B7A-43D3-8B79-37D633B846F1}">
-                <asvg:svgBlip xmlns:asvg="http://schemas.microsoft.com/office/drawing/2016/SVG/main" r:embed="rId6"/>
+                <asvg:svgBlip xmlns:asvg="http://schemas.microsoft.com/office/drawing/2016/SVG/main" r:embed="rId3"/>
               </a:ext>
             </a:extLst>
           </a:blip>
@@ -3437,13 +3439,13 @@
       <dgm:prSet presAssocID="{F292AE27-B155-4DD9-89B0-E2FE87D51EBC}" presName="iconRect" presStyleLbl="node1" presStyleIdx="3" presStyleCnt="4"/>
       <dgm:spPr>
         <a:blipFill>
-          <a:blip xmlns:r="http://schemas.openxmlformats.org/officeDocument/2006/relationships" r:embed="rId7">
+          <a:blip xmlns:r="http://schemas.openxmlformats.org/officeDocument/2006/relationships">
             <a:extLst>
               <a:ext uri="{28A0092B-C50C-407E-A947-70E740481C1C}">
                 <a14:useLocalDpi xmlns:a14="http://schemas.microsoft.com/office/drawing/2010/main" val="0"/>
               </a:ext>
               <a:ext uri="{96DAC541-7B7A-43D3-8B79-37D633B846F1}">
-                <asvg:svgBlip xmlns:asvg="http://schemas.microsoft.com/office/drawing/2016/SVG/main" r:embed="rId8"/>
+                <asvg:svgBlip xmlns:asvg="http://schemas.microsoft.com/office/drawing/2016/SVG/main" r:embed="rId4"/>
               </a:ext>
             </a:extLst>
           </a:blip>
@@ -3709,10 +3711,10 @@
       <dgm:prSet presAssocID="{BA07DD25-6B41-4815-8285-46CEFC1961DC}" presName="iconRect" presStyleLbl="node1" presStyleIdx="0" presStyleCnt="3"/>
       <dgm:spPr>
         <a:blipFill>
-          <a:blip xmlns:r="http://schemas.openxmlformats.org/officeDocument/2006/relationships" r:embed="rId1">
+          <a:blip xmlns:r="http://schemas.openxmlformats.org/officeDocument/2006/relationships">
             <a:extLst>
               <a:ext uri="{96DAC541-7B7A-43D3-8B79-37D633B846F1}">
-                <asvg:svgBlip xmlns:asvg="http://schemas.microsoft.com/office/drawing/2016/SVG/main" r:embed="rId2"/>
+                <asvg:svgBlip xmlns:asvg="http://schemas.microsoft.com/office/drawing/2016/SVG/main" r:embed="rId1"/>
               </a:ext>
             </a:extLst>
           </a:blip>
@@ -3757,13 +3759,13 @@
       <dgm:prSet presAssocID="{15BB9DEC-26A2-471B-95D2-314D9EAD4FAC}" presName="iconRect" presStyleLbl="node1" presStyleIdx="1" presStyleCnt="3"/>
       <dgm:spPr>
         <a:blipFill>
-          <a:blip xmlns:r="http://schemas.openxmlformats.org/officeDocument/2006/relationships" r:embed="rId3">
+          <a:blip xmlns:r="http://schemas.openxmlformats.org/officeDocument/2006/relationships">
             <a:extLst>
               <a:ext uri="{28A0092B-C50C-407E-A947-70E740481C1C}">
                 <a14:useLocalDpi xmlns:a14="http://schemas.microsoft.com/office/drawing/2010/main" val="0"/>
               </a:ext>
               <a:ext uri="{96DAC541-7B7A-43D3-8B79-37D633B846F1}">
-                <asvg:svgBlip xmlns:asvg="http://schemas.microsoft.com/office/drawing/2016/SVG/main" r:embed="rId4"/>
+                <asvg:svgBlip xmlns:asvg="http://schemas.microsoft.com/office/drawing/2016/SVG/main" r:embed="rId2"/>
               </a:ext>
             </a:extLst>
           </a:blip>
@@ -3808,13 +3810,13 @@
       <dgm:prSet presAssocID="{7B916CB2-B2C5-49CB-8811-078227C5C988}" presName="iconRect" presStyleLbl="node1" presStyleIdx="2" presStyleCnt="3"/>
       <dgm:spPr>
         <a:blipFill>
-          <a:blip xmlns:r="http://schemas.openxmlformats.org/officeDocument/2006/relationships" r:embed="rId5">
+          <a:blip xmlns:r="http://schemas.openxmlformats.org/officeDocument/2006/relationships">
             <a:extLst>
               <a:ext uri="{28A0092B-C50C-407E-A947-70E740481C1C}">
                 <a14:useLocalDpi xmlns:a14="http://schemas.microsoft.com/office/drawing/2010/main" val="0"/>
               </a:ext>
               <a:ext uri="{96DAC541-7B7A-43D3-8B79-37D633B846F1}">
-                <asvg:svgBlip xmlns:asvg="http://schemas.microsoft.com/office/drawing/2016/SVG/main" r:embed="rId6"/>
+                <asvg:svgBlip xmlns:asvg="http://schemas.microsoft.com/office/drawing/2016/SVG/main" r:embed="rId3"/>
               </a:ext>
             </a:extLst>
           </a:blip>
@@ -4306,13 +4308,13 @@
           <a:avLst/>
         </a:prstGeom>
         <a:blipFill>
-          <a:blip xmlns:r="http://schemas.openxmlformats.org/officeDocument/2006/relationships" r:embed="rId1">
+          <a:blip xmlns:r="http://schemas.openxmlformats.org/officeDocument/2006/relationships">
             <a:extLst>
               <a:ext uri="{28A0092B-C50C-407E-A947-70E740481C1C}">
                 <a14:useLocalDpi xmlns:a14="http://schemas.microsoft.com/office/drawing/2010/main" val="0"/>
               </a:ext>
               <a:ext uri="{96DAC541-7B7A-43D3-8B79-37D633B846F1}">
-                <asvg:svgBlip xmlns:asvg="http://schemas.microsoft.com/office/drawing/2016/SVG/main" r:embed="rId2"/>
+                <asvg:svgBlip xmlns:asvg="http://schemas.microsoft.com/office/drawing/2016/SVG/main" r:embed="rId1"/>
               </a:ext>
             </a:extLst>
           </a:blip>
@@ -4457,13 +4459,13 @@
           <a:avLst/>
         </a:prstGeom>
         <a:blipFill>
-          <a:blip xmlns:r="http://schemas.openxmlformats.org/officeDocument/2006/relationships" r:embed="rId3">
+          <a:blip xmlns:r="http://schemas.openxmlformats.org/officeDocument/2006/relationships">
             <a:extLst>
               <a:ext uri="{28A0092B-C50C-407E-A947-70E740481C1C}">
                 <a14:useLocalDpi xmlns:a14="http://schemas.microsoft.com/office/drawing/2010/main" val="0"/>
               </a:ext>
               <a:ext uri="{96DAC541-7B7A-43D3-8B79-37D633B846F1}">
-                <asvg:svgBlip xmlns:asvg="http://schemas.microsoft.com/office/drawing/2016/SVG/main" r:embed="rId4"/>
+                <asvg:svgBlip xmlns:asvg="http://schemas.microsoft.com/office/drawing/2016/SVG/main" r:embed="rId2"/>
               </a:ext>
             </a:extLst>
           </a:blip>
@@ -4608,13 +4610,13 @@
           <a:avLst/>
         </a:prstGeom>
         <a:blipFill>
-          <a:blip xmlns:r="http://schemas.openxmlformats.org/officeDocument/2006/relationships" r:embed="rId5">
+          <a:blip xmlns:r="http://schemas.openxmlformats.org/officeDocument/2006/relationships">
             <a:extLst>
               <a:ext uri="{28A0092B-C50C-407E-A947-70E740481C1C}">
                 <a14:useLocalDpi xmlns:a14="http://schemas.microsoft.com/office/drawing/2010/main" val="0"/>
               </a:ext>
               <a:ext uri="{96DAC541-7B7A-43D3-8B79-37D633B846F1}">
-                <asvg:svgBlip xmlns:asvg="http://schemas.microsoft.com/office/drawing/2016/SVG/main" r:embed="rId6"/>
+                <asvg:svgBlip xmlns:asvg="http://schemas.microsoft.com/office/drawing/2016/SVG/main" r:embed="rId3"/>
               </a:ext>
             </a:extLst>
           </a:blip>
@@ -4759,13 +4761,13 @@
           <a:avLst/>
         </a:prstGeom>
         <a:blipFill>
-          <a:blip xmlns:r="http://schemas.openxmlformats.org/officeDocument/2006/relationships" r:embed="rId7">
+          <a:blip xmlns:r="http://schemas.openxmlformats.org/officeDocument/2006/relationships">
             <a:extLst>
               <a:ext uri="{28A0092B-C50C-407E-A947-70E740481C1C}">
                 <a14:useLocalDpi xmlns:a14="http://schemas.microsoft.com/office/drawing/2010/main" val="0"/>
               </a:ext>
               <a:ext uri="{96DAC541-7B7A-43D3-8B79-37D633B846F1}">
-                <asvg:svgBlip xmlns:asvg="http://schemas.microsoft.com/office/drawing/2016/SVG/main" r:embed="rId8"/>
+                <asvg:svgBlip xmlns:asvg="http://schemas.microsoft.com/office/drawing/2016/SVG/main" r:embed="rId4"/>
               </a:ext>
             </a:extLst>
           </a:blip>
@@ -4932,10 +4934,10 @@
           <a:avLst/>
         </a:prstGeom>
         <a:blipFill>
-          <a:blip xmlns:r="http://schemas.openxmlformats.org/officeDocument/2006/relationships" r:embed="rId1">
+          <a:blip xmlns:r="http://schemas.openxmlformats.org/officeDocument/2006/relationships">
             <a:extLst>
               <a:ext uri="{96DAC541-7B7A-43D3-8B79-37D633B846F1}">
-                <asvg:svgBlip xmlns:asvg="http://schemas.microsoft.com/office/drawing/2016/SVG/main" r:embed="rId2"/>
+                <asvg:svgBlip xmlns:asvg="http://schemas.microsoft.com/office/drawing/2016/SVG/main" r:embed="rId1"/>
               </a:ext>
             </a:extLst>
           </a:blip>
@@ -5089,13 +5091,13 @@
           <a:avLst/>
         </a:prstGeom>
         <a:blipFill>
-          <a:blip xmlns:r="http://schemas.openxmlformats.org/officeDocument/2006/relationships" r:embed="rId3">
+          <a:blip xmlns:r="http://schemas.openxmlformats.org/officeDocument/2006/relationships">
             <a:extLst>
               <a:ext uri="{28A0092B-C50C-407E-A947-70E740481C1C}">
                 <a14:useLocalDpi xmlns:a14="http://schemas.microsoft.com/office/drawing/2010/main" val="0"/>
               </a:ext>
               <a:ext uri="{96DAC541-7B7A-43D3-8B79-37D633B846F1}">
-                <asvg:svgBlip xmlns:asvg="http://schemas.microsoft.com/office/drawing/2016/SVG/main" r:embed="rId4"/>
+                <asvg:svgBlip xmlns:asvg="http://schemas.microsoft.com/office/drawing/2016/SVG/main" r:embed="rId2"/>
               </a:ext>
             </a:extLst>
           </a:blip>
@@ -5248,13 +5250,13 @@
           <a:avLst/>
         </a:prstGeom>
         <a:blipFill>
-          <a:blip xmlns:r="http://schemas.openxmlformats.org/officeDocument/2006/relationships" r:embed="rId5">
+          <a:blip xmlns:r="http://schemas.openxmlformats.org/officeDocument/2006/relationships">
             <a:extLst>
               <a:ext uri="{28A0092B-C50C-407E-A947-70E740481C1C}">
                 <a14:useLocalDpi xmlns:a14="http://schemas.microsoft.com/office/drawing/2010/main" val="0"/>
               </a:ext>
               <a:ext uri="{96DAC541-7B7A-43D3-8B79-37D633B846F1}">
-                <asvg:svgBlip xmlns:asvg="http://schemas.microsoft.com/office/drawing/2016/SVG/main" r:embed="rId6"/>
+                <asvg:svgBlip xmlns:asvg="http://schemas.microsoft.com/office/drawing/2016/SVG/main" r:embed="rId3"/>
               </a:ext>
             </a:extLst>
           </a:blip>
@@ -9285,7 +9287,7 @@
             <a:fld id="{71CA99E0-E95C-4F1B-B0F2-4565A2B40149}" type="datetimeFigureOut">
               <a:rPr lang="en-US" smtClean="0"/>
               <a:pPr/>
-              <a:t>11/17/2025</a:t>
+              <a:t>4/20/2026</a:t>
             </a:fld>
             <a:endParaRPr lang="en-US"/>
           </a:p>
@@ -10938,7 +10940,7 @@
             <a:fld id="{C6A2EA70-8A4C-40BF-A25E-4BD4BBF0DDA4}" type="slidenum">
               <a:rPr lang="en-US" smtClean="0"/>
               <a:pPr/>
-              <a:t>33</a:t>
+              <a:t>32</a:t>
             </a:fld>
             <a:endParaRPr lang="en-US"/>
           </a:p>
@@ -11020,7 +11022,7 @@
             <a:fld id="{C6A2EA70-8A4C-40BF-A25E-4BD4BBF0DDA4}" type="slidenum">
               <a:rPr lang="en-US" smtClean="0"/>
               <a:pPr/>
-              <a:t>34</a:t>
+              <a:t>33</a:t>
             </a:fld>
             <a:endParaRPr lang="en-US"/>
           </a:p>
@@ -11102,7 +11104,7 @@
             <a:fld id="{C6A2EA70-8A4C-40BF-A25E-4BD4BBF0DDA4}" type="slidenum">
               <a:rPr lang="en-US" smtClean="0"/>
               <a:pPr/>
-              <a:t>35</a:t>
+              <a:t>34</a:t>
             </a:fld>
             <a:endParaRPr lang="en-US"/>
           </a:p>
@@ -11184,7 +11186,7 @@
             <a:fld id="{C6A2EA70-8A4C-40BF-A25E-4BD4BBF0DDA4}" type="slidenum">
               <a:rPr lang="en-US" smtClean="0"/>
               <a:pPr/>
-              <a:t>36</a:t>
+              <a:t>35</a:t>
             </a:fld>
             <a:endParaRPr lang="en-US"/>
           </a:p>
@@ -11266,7 +11268,7 @@
             <a:fld id="{C6A2EA70-8A4C-40BF-A25E-4BD4BBF0DDA4}" type="slidenum">
               <a:rPr lang="en-US" smtClean="0"/>
               <a:pPr/>
-              <a:t>37</a:t>
+              <a:t>36</a:t>
             </a:fld>
             <a:endParaRPr lang="en-US"/>
           </a:p>
@@ -11348,7 +11350,7 @@
             <a:fld id="{C6A2EA70-8A4C-40BF-A25E-4BD4BBF0DDA4}" type="slidenum">
               <a:rPr lang="en-US" smtClean="0"/>
               <a:pPr/>
-              <a:t>38</a:t>
+              <a:t>37</a:t>
             </a:fld>
             <a:endParaRPr lang="en-US"/>
           </a:p>
@@ -11512,7 +11514,7 @@
             <a:fld id="{C6A2EA70-8A4C-40BF-A25E-4BD4BBF0DDA4}" type="slidenum">
               <a:rPr lang="en-US" smtClean="0"/>
               <a:pPr/>
-              <a:t>39</a:t>
+              <a:t>38</a:t>
             </a:fld>
             <a:endParaRPr lang="en-US"/>
           </a:p>
@@ -11599,7 +11601,7 @@
             <a:fld id="{C6A2EA70-8A4C-40BF-A25E-4BD4BBF0DDA4}" type="slidenum">
               <a:rPr lang="en-US" smtClean="0"/>
               <a:pPr/>
-              <a:t>41</a:t>
+              <a:t>40</a:t>
             </a:fld>
             <a:endParaRPr lang="en-US"/>
           </a:p>
@@ -11686,7 +11688,7 @@
             <a:fld id="{C6A2EA70-8A4C-40BF-A25E-4BD4BBF0DDA4}" type="slidenum">
               <a:rPr lang="en-US" smtClean="0"/>
               <a:pPr/>
-              <a:t>43</a:t>
+              <a:t>42</a:t>
             </a:fld>
             <a:endParaRPr lang="en-US"/>
           </a:p>
@@ -29615,7 +29617,7 @@
                   <a:schemeClr val="bg1"/>
                 </a:solidFill>
               </a:rPr>
-              <a:t>Exact Inference in BN</a:t>
+              <a:t>Exact Inference in Bayesian Networks</a:t>
             </a:r>
           </a:p>
         </p:txBody>
@@ -34694,7 +34696,7 @@
                   <a:schemeClr val="bg1"/>
                 </a:solidFill>
               </a:rPr>
-              <a:t>Approximate Inference in BN</a:t>
+              <a:t>Approximate Inference in Bayesian Networks</a:t>
             </a:r>
           </a:p>
         </p:txBody>
@@ -35032,107 +35034,6 @@
       </p:grpSpPr>
       <p:sp>
         <p:nvSpPr>
-          <p:cNvPr id="4" name="Title 3">
-            <a:extLst>
-              <a:ext uri="{FF2B5EF4-FFF2-40B4-BE49-F238E27FC236}">
-                <a16:creationId xmlns:a16="http://schemas.microsoft.com/office/drawing/2014/main" id="{B9344724-5811-7FC9-D721-1CC26B8FA08B}"/>
-              </a:ext>
-            </a:extLst>
-          </p:cNvPr>
-          <p:cNvSpPr>
-            <a:spLocks noGrp="1"/>
-          </p:cNvSpPr>
-          <p:nvPr>
-            <p:ph type="title"/>
-          </p:nvPr>
-        </p:nvSpPr>
-        <p:spPr/>
-        <p:txBody>
-          <a:bodyPr/>
-          <a:lstStyle/>
-          <a:p>
-            <a:r>
-              <a:rPr lang="en-US" dirty="0"/>
-              <a:t>Estimating </a:t>
-            </a:r>
-            <a:r>
-              <a:rPr lang="en-US" b="1" dirty="0"/>
-              <a:t>Joint and </a:t>
-            </a:r>
-            <a:br>
-              <a:rPr lang="en-US" b="1" dirty="0"/>
-            </a:br>
-            <a:r>
-              <a:rPr lang="en-US" b="1" dirty="0"/>
-              <a:t>Marginal Probability Distributions </a:t>
-            </a:r>
-            <a:br>
-              <a:rPr lang="en-US" dirty="0"/>
-            </a:br>
-            <a:r>
-              <a:rPr lang="en-US" dirty="0"/>
-              <a:t>from BNs</a:t>
-            </a:r>
-          </a:p>
-        </p:txBody>
-      </p:sp>
-      <p:sp>
-        <p:nvSpPr>
-          <p:cNvPr id="5" name="Text Placeholder 4">
-            <a:extLst>
-              <a:ext uri="{FF2B5EF4-FFF2-40B4-BE49-F238E27FC236}">
-                <a16:creationId xmlns:a16="http://schemas.microsoft.com/office/drawing/2014/main" id="{39E4928C-1D50-1957-C3A6-34166C1A2703}"/>
-              </a:ext>
-            </a:extLst>
-          </p:cNvPr>
-          <p:cNvSpPr>
-            <a:spLocks noGrp="1"/>
-          </p:cNvSpPr>
-          <p:nvPr>
-            <p:ph type="body" idx="1"/>
-          </p:nvPr>
-        </p:nvSpPr>
-        <p:spPr/>
-        <p:txBody>
-          <a:bodyPr/>
-          <a:lstStyle/>
-          <a:p>
-            <a:endParaRPr lang="en-US"/>
-          </a:p>
-        </p:txBody>
-      </p:sp>
-    </p:spTree>
-    <p:extLst>
-      <p:ext uri="{BB962C8B-B14F-4D97-AF65-F5344CB8AC3E}">
-        <p14:creationId xmlns:p14="http://schemas.microsoft.com/office/powerpoint/2010/main" val="3318817501"/>
-      </p:ext>
-    </p:extLst>
-  </p:cSld>
-  <p:clrMapOvr>
-    <a:masterClrMapping/>
-  </p:clrMapOvr>
-</p:sld>
-</file>
-
-<file path=ppt/slides/slide32.xml><?xml version="1.0" encoding="utf-8"?>
-<p:sld xmlns:a="http://schemas.openxmlformats.org/drawingml/2006/main" xmlns:r="http://schemas.openxmlformats.org/officeDocument/2006/relationships" xmlns:p="http://schemas.openxmlformats.org/presentationml/2006/main">
-  <p:cSld>
-    <p:spTree>
-      <p:nvGrpSpPr>
-        <p:cNvPr id="1" name=""/>
-        <p:cNvGrpSpPr/>
-        <p:nvPr/>
-      </p:nvGrpSpPr>
-      <p:grpSpPr>
-        <a:xfrm>
-          <a:off x="0" y="0"/>
-          <a:ext cx="0" cy="0"/>
-          <a:chOff x="0" y="0"/>
-          <a:chExt cx="0" cy="0"/>
-        </a:xfrm>
-      </p:grpSpPr>
-      <p:sp>
-        <p:nvSpPr>
           <p:cNvPr id="2" name="Title 1">
             <a:extLst>
               <a:ext uri="{FF2B5EF4-FFF2-40B4-BE49-F238E27FC236}">
@@ -35445,7 +35346,7 @@
 </p:sld>
 </file>
 
-<file path=ppt/slides/slide33.xml><?xml version="1.0" encoding="utf-8"?>
+<file path=ppt/slides/slide32.xml><?xml version="1.0" encoding="utf-8"?>
 <p:sld xmlns:a="http://schemas.openxmlformats.org/drawingml/2006/main" xmlns:r="http://schemas.openxmlformats.org/officeDocument/2006/relationships" xmlns:p="http://schemas.openxmlformats.org/presentationml/2006/main">
   <p:cSld>
     <p:spTree>
@@ -35655,7 +35556,7 @@
 </p:sld>
 </file>
 
-<file path=ppt/slides/slide34.xml><?xml version="1.0" encoding="utf-8"?>
+<file path=ppt/slides/slide33.xml><?xml version="1.0" encoding="utf-8"?>
 <p:sld xmlns:a="http://schemas.openxmlformats.org/drawingml/2006/main" xmlns:r="http://schemas.openxmlformats.org/officeDocument/2006/relationships" xmlns:p="http://schemas.openxmlformats.org/presentationml/2006/main">
   <p:cSld>
     <p:spTree>
@@ -35876,7 +35777,7 @@
 </p:sld>
 </file>
 
-<file path=ppt/slides/slide35.xml><?xml version="1.0" encoding="utf-8"?>
+<file path=ppt/slides/slide34.xml><?xml version="1.0" encoding="utf-8"?>
 <p:sld xmlns:a="http://schemas.openxmlformats.org/drawingml/2006/main" xmlns:r="http://schemas.openxmlformats.org/officeDocument/2006/relationships" xmlns:p="http://schemas.openxmlformats.org/presentationml/2006/main">
   <p:cSld>
     <p:spTree>
@@ -36034,7 +35935,7 @@
 </p:sld>
 </file>
 
-<file path=ppt/slides/slide36.xml><?xml version="1.0" encoding="utf-8"?>
+<file path=ppt/slides/slide35.xml><?xml version="1.0" encoding="utf-8"?>
 <p:sld xmlns:a="http://schemas.openxmlformats.org/drawingml/2006/main" xmlns:r="http://schemas.openxmlformats.org/officeDocument/2006/relationships" xmlns:p="http://schemas.openxmlformats.org/presentationml/2006/main">
   <p:cSld>
     <p:spTree>
@@ -36192,7 +36093,7 @@
 </p:sld>
 </file>
 
-<file path=ppt/slides/slide37.xml><?xml version="1.0" encoding="utf-8"?>
+<file path=ppt/slides/slide36.xml><?xml version="1.0" encoding="utf-8"?>
 <p:sld xmlns:a="http://schemas.openxmlformats.org/drawingml/2006/main" xmlns:r="http://schemas.openxmlformats.org/officeDocument/2006/relationships" xmlns:p="http://schemas.openxmlformats.org/presentationml/2006/main">
   <p:cSld>
     <p:spTree>
@@ -36350,7 +36251,7 @@
 </p:sld>
 </file>
 
-<file path=ppt/slides/slide38.xml><?xml version="1.0" encoding="utf-8"?>
+<file path=ppt/slides/slide37.xml><?xml version="1.0" encoding="utf-8"?>
 <p:sld xmlns:a="http://schemas.openxmlformats.org/drawingml/2006/main" xmlns:r="http://schemas.openxmlformats.org/officeDocument/2006/relationships" xmlns:p="http://schemas.openxmlformats.org/presentationml/2006/main">
   <p:cSld>
     <p:spTree>
@@ -36575,7 +36476,7 @@
 </p:sld>
 </file>
 
-<file path=ppt/slides/slide39.xml><?xml version="1.0" encoding="utf-8"?>
+<file path=ppt/slides/slide38.xml><?xml version="1.0" encoding="utf-8"?>
 <p:sld xmlns:a="http://schemas.openxmlformats.org/drawingml/2006/main" xmlns:r="http://schemas.openxmlformats.org/officeDocument/2006/relationships" xmlns:p="http://schemas.openxmlformats.org/presentationml/2006/main">
   <p:cSld>
     <p:spTree>
@@ -37592,6 +37493,403 @@
 </p:sld>
 </file>
 
+<file path=ppt/slides/slide39.xml><?xml version="1.0" encoding="utf-8"?>
+<p:sld xmlns:a="http://schemas.openxmlformats.org/drawingml/2006/main" xmlns:r="http://schemas.openxmlformats.org/officeDocument/2006/relationships" xmlns:p="http://schemas.openxmlformats.org/presentationml/2006/main">
+  <p:cSld>
+    <p:bg>
+      <p:bgPr>
+        <a:solidFill>
+          <a:schemeClr val="bg1"/>
+        </a:solidFill>
+        <a:effectLst/>
+      </p:bgPr>
+    </p:bg>
+    <p:spTree>
+      <p:nvGrpSpPr>
+        <p:cNvPr id="1" name="">
+          <a:extLst>
+            <a:ext uri="{FF2B5EF4-FFF2-40B4-BE49-F238E27FC236}">
+              <a16:creationId xmlns:a16="http://schemas.microsoft.com/office/drawing/2014/main" id="{8C1424D7-6406-FC8F-EBF6-8FF4A7B6FCED}"/>
+            </a:ext>
+          </a:extLst>
+        </p:cNvPr>
+        <p:cNvGrpSpPr/>
+        <p:nvPr/>
+      </p:nvGrpSpPr>
+      <p:grpSpPr>
+        <a:xfrm>
+          <a:off x="0" y="0"/>
+          <a:ext cx="0" cy="0"/>
+          <a:chOff x="0" y="0"/>
+          <a:chExt cx="0" cy="0"/>
+        </a:xfrm>
+      </p:grpSpPr>
+      <p:sp useBgFill="1">
+        <p:nvSpPr>
+          <p:cNvPr id="11" name="Rectangle 10">
+            <a:extLst>
+              <a:ext uri="{FF2B5EF4-FFF2-40B4-BE49-F238E27FC236}">
+                <a16:creationId xmlns:a16="http://schemas.microsoft.com/office/drawing/2014/main" id="{5A59F003-E00A-43F9-91DC-CC54E3B87466}"/>
+              </a:ext>
+              <a:ext uri="{C183D7F6-B498-43B3-948B-1728B52AA6E4}">
+                <adec:decorative xmlns:adec="http://schemas.microsoft.com/office/drawing/2017/decorative" val="1"/>
+              </a:ext>
+            </a:extLst>
+          </p:cNvPr>
+          <p:cNvSpPr>
+            <a:spLocks noGrp="1" noRot="1" noChangeAspect="1" noMove="1" noResize="1" noEditPoints="1" noAdjustHandles="1" noChangeArrowheads="1" noChangeShapeType="1" noTextEdit="1"/>
+          </p:cNvSpPr>
+          <p:nvPr>
+            <p:extLst>
+              <p:ext uri="{386F3935-93C4-4BCD-93E2-E3B085C9AB24}">
+                <p16:designElem xmlns:p16="http://schemas.microsoft.com/office/powerpoint/2015/main" val="1"/>
+              </p:ext>
+            </p:extLst>
+          </p:nvPr>
+        </p:nvSpPr>
+        <p:spPr>
+          <a:xfrm>
+            <a:off x="0" y="0"/>
+            <a:ext cx="9144000" cy="6858000"/>
+          </a:xfrm>
+          <a:prstGeom prst="rect">
+            <a:avLst/>
+          </a:prstGeom>
+          <a:ln>
+            <a:noFill/>
+          </a:ln>
+        </p:spPr>
+        <p:style>
+          <a:lnRef idx="2">
+            <a:schemeClr val="accent1">
+              <a:shade val="50000"/>
+            </a:schemeClr>
+          </a:lnRef>
+          <a:fillRef idx="1">
+            <a:schemeClr val="accent1"/>
+          </a:fillRef>
+          <a:effectRef idx="0">
+            <a:schemeClr val="accent1"/>
+          </a:effectRef>
+          <a:fontRef idx="minor">
+            <a:schemeClr val="lt1"/>
+          </a:fontRef>
+        </p:style>
+        <p:txBody>
+          <a:bodyPr rtlCol="0" anchor="ctr"/>
+          <a:lstStyle/>
+          <a:p>
+            <a:pPr algn="ctr"/>
+            <a:endParaRPr lang="en-US"/>
+          </a:p>
+        </p:txBody>
+      </p:sp>
+      <p:pic>
+        <p:nvPicPr>
+          <p:cNvPr id="6" name="Picture 2" descr="Image for post">
+            <a:extLst>
+              <a:ext uri="{FF2B5EF4-FFF2-40B4-BE49-F238E27FC236}">
+                <a16:creationId xmlns:a16="http://schemas.microsoft.com/office/drawing/2014/main" id="{DDE4ABB0-FDDA-F305-2C1C-5250C0E4B4BC}"/>
+              </a:ext>
+            </a:extLst>
+          </p:cNvPr>
+          <p:cNvPicPr>
+            <a:picLocks noChangeAspect="1" noChangeArrowheads="1"/>
+          </p:cNvPicPr>
+          <p:nvPr/>
+        </p:nvPicPr>
+        <p:blipFill rotWithShape="1">
+          <a:blip r:embed="rId2">
+            <a:extLst>
+              <a:ext uri="{BEBA8EAE-BF5A-486C-A8C5-ECC9F3942E4B}">
+                <a14:imgProps xmlns:a14="http://schemas.microsoft.com/office/drawing/2010/main">
+                  <a14:imgLayer r:embed="rId3">
+                    <a14:imgEffect>
+                      <a14:artisticMosiaicBubbles/>
+                    </a14:imgEffect>
+                    <a14:imgEffect>
+                      <a14:saturation sat="33000"/>
+                    </a14:imgEffect>
+                  </a14:imgLayer>
+                </a14:imgProps>
+              </a:ext>
+              <a:ext uri="{28A0092B-C50C-407E-A947-70E740481C1C}">
+                <a14:useLocalDpi xmlns:a14="http://schemas.microsoft.com/office/drawing/2010/main" val="0"/>
+              </a:ext>
+            </a:extLst>
+          </a:blip>
+          <a:srcRect r="10668" b="2"/>
+          <a:stretch>
+            <a:fillRect/>
+          </a:stretch>
+        </p:blipFill>
+        <p:spPr bwMode="auto">
+          <a:xfrm>
+            <a:off x="20" y="10"/>
+            <a:ext cx="9143980" cy="6857990"/>
+          </a:xfrm>
+          <a:prstGeom prst="rect">
+            <a:avLst/>
+          </a:prstGeom>
+          <a:noFill/>
+          <a:extLst>
+            <a:ext uri="{909E8E84-426E-40DD-AFC4-6F175D3DCCD1}">
+              <a14:hiddenFill xmlns:a14="http://schemas.microsoft.com/office/drawing/2010/main">
+                <a:solidFill>
+                  <a:srgbClr val="FFFFFF"/>
+                </a:solidFill>
+              </a14:hiddenFill>
+            </a:ext>
+          </a:extLst>
+        </p:spPr>
+      </p:pic>
+      <p:sp>
+        <p:nvSpPr>
+          <p:cNvPr id="13" name="Rectangle 12">
+            <a:extLst>
+              <a:ext uri="{FF2B5EF4-FFF2-40B4-BE49-F238E27FC236}">
+                <a16:creationId xmlns:a16="http://schemas.microsoft.com/office/drawing/2014/main" id="{D74A4382-E3AD-430A-9A1F-DFA3E0E77A7D}"/>
+              </a:ext>
+              <a:ext uri="{C183D7F6-B498-43B3-948B-1728B52AA6E4}">
+                <adec:decorative xmlns:adec="http://schemas.microsoft.com/office/drawing/2017/decorative" val="1"/>
+              </a:ext>
+            </a:extLst>
+          </p:cNvPr>
+          <p:cNvSpPr>
+            <a:spLocks noGrp="1" noRot="1" noChangeAspect="1" noMove="1" noResize="1" noEditPoints="1" noAdjustHandles="1" noChangeArrowheads="1" noChangeShapeType="1" noTextEdit="1"/>
+          </p:cNvSpPr>
+          <p:nvPr>
+            <p:extLst>
+              <p:ext uri="{386F3935-93C4-4BCD-93E2-E3B085C9AB24}">
+                <p16:designElem xmlns:p16="http://schemas.microsoft.com/office/powerpoint/2015/main" val="1"/>
+              </p:ext>
+            </p:extLst>
+          </p:nvPr>
+        </p:nvSpPr>
+        <p:spPr>
+          <a:xfrm rot="16200000">
+            <a:off x="2275865" y="-511"/>
+            <a:ext cx="4592270" cy="9144001"/>
+          </a:xfrm>
+          <a:prstGeom prst="rect">
+            <a:avLst/>
+          </a:prstGeom>
+          <a:gradFill>
+            <a:gsLst>
+              <a:gs pos="35000">
+                <a:schemeClr val="tx1">
+                  <a:alpha val="46000"/>
+                </a:schemeClr>
+              </a:gs>
+              <a:gs pos="21000">
+                <a:schemeClr val="tx1">
+                  <a:alpha val="30000"/>
+                </a:schemeClr>
+              </a:gs>
+              <a:gs pos="0">
+                <a:schemeClr val="tx1">
+                  <a:alpha val="0"/>
+                </a:schemeClr>
+              </a:gs>
+              <a:gs pos="100000">
+                <a:schemeClr val="tx1">
+                  <a:alpha val="90000"/>
+                </a:schemeClr>
+              </a:gs>
+            </a:gsLst>
+            <a:lin ang="10800000" scaled="0"/>
+          </a:gradFill>
+          <a:ln>
+            <a:noFill/>
+          </a:ln>
+        </p:spPr>
+        <p:style>
+          <a:lnRef idx="2">
+            <a:schemeClr val="accent1">
+              <a:shade val="50000"/>
+            </a:schemeClr>
+          </a:lnRef>
+          <a:fillRef idx="1">
+            <a:schemeClr val="accent1"/>
+          </a:fillRef>
+          <a:effectRef idx="0">
+            <a:schemeClr val="accent1"/>
+          </a:effectRef>
+          <a:fontRef idx="minor">
+            <a:schemeClr val="lt1"/>
+          </a:fontRef>
+        </p:style>
+        <p:txBody>
+          <a:bodyPr rtlCol="0" anchor="ctr"/>
+          <a:lstStyle/>
+          <a:p>
+            <a:pPr algn="ctr"/>
+            <a:endParaRPr lang="en-US" dirty="0"/>
+          </a:p>
+        </p:txBody>
+      </p:sp>
+      <p:sp>
+        <p:nvSpPr>
+          <p:cNvPr id="4" name="Title 3">
+            <a:extLst>
+              <a:ext uri="{FF2B5EF4-FFF2-40B4-BE49-F238E27FC236}">
+                <a16:creationId xmlns:a16="http://schemas.microsoft.com/office/drawing/2014/main" id="{216BCAB6-AD95-77E1-7C79-37595DD469B9}"/>
+              </a:ext>
+            </a:extLst>
+          </p:cNvPr>
+          <p:cNvSpPr>
+            <a:spLocks noGrp="1"/>
+          </p:cNvSpPr>
+          <p:nvPr>
+            <p:ph type="title"/>
+          </p:nvPr>
+        </p:nvSpPr>
+        <p:spPr>
+          <a:xfrm>
+            <a:off x="303414" y="3091928"/>
+            <a:ext cx="7545186" cy="2387600"/>
+          </a:xfrm>
+        </p:spPr>
+        <p:txBody>
+          <a:bodyPr vert="horz" lIns="91440" tIns="45720" rIns="91440" bIns="45720" rtlCol="0" anchor="b">
+            <a:normAutofit/>
+          </a:bodyPr>
+          <a:lstStyle/>
+          <a:p>
+            <a:pPr defTabSz="914400"/>
+            <a:r>
+              <a:rPr lang="en-US" sz="5700" b="1" dirty="0">
+                <a:solidFill>
+                  <a:schemeClr val="bg1"/>
+                </a:solidFill>
+              </a:rPr>
+              <a:t>Approximate Inference in Bayesian Networks</a:t>
+            </a:r>
+          </a:p>
+        </p:txBody>
+      </p:sp>
+      <p:sp>
+        <p:nvSpPr>
+          <p:cNvPr id="15" name="Rectangle: Rounded Corners 14">
+            <a:extLst>
+              <a:ext uri="{FF2B5EF4-FFF2-40B4-BE49-F238E27FC236}">
+                <a16:creationId xmlns:a16="http://schemas.microsoft.com/office/drawing/2014/main" id="{79F40191-0F44-4FD1-82CC-ACB507C14BE6}"/>
+              </a:ext>
+              <a:ext uri="{C183D7F6-B498-43B3-948B-1728B52AA6E4}">
+                <adec:decorative xmlns:adec="http://schemas.microsoft.com/office/drawing/2017/decorative" val="1"/>
+              </a:ext>
+            </a:extLst>
+          </p:cNvPr>
+          <p:cNvSpPr>
+            <a:spLocks noGrp="1" noRot="1" noChangeAspect="1" noMove="1" noResize="1" noEditPoints="1" noAdjustHandles="1" noChangeArrowheads="1" noChangeShapeType="1" noTextEdit="1"/>
+          </p:cNvSpPr>
+          <p:nvPr>
+            <p:extLst>
+              <p:ext uri="{386F3935-93C4-4BCD-93E2-E3B085C9AB24}">
+                <p16:designElem xmlns:p16="http://schemas.microsoft.com/office/powerpoint/2015/main" val="1"/>
+              </p:ext>
+            </p:extLst>
+          </p:nvPr>
+        </p:nvSpPr>
+        <p:spPr>
+          <a:xfrm>
+            <a:off x="0" y="5575039"/>
+            <a:ext cx="7339422" cy="685800"/>
+          </a:xfrm>
+          <a:prstGeom prst="roundRect">
+            <a:avLst>
+              <a:gd name="adj" fmla="val 0"/>
+            </a:avLst>
+          </a:prstGeom>
+          <a:solidFill>
+            <a:schemeClr val="accent2"/>
+          </a:solidFill>
+          <a:ln>
+            <a:noFill/>
+          </a:ln>
+        </p:spPr>
+        <p:style>
+          <a:lnRef idx="2">
+            <a:schemeClr val="accent1">
+              <a:shade val="50000"/>
+            </a:schemeClr>
+          </a:lnRef>
+          <a:fillRef idx="1">
+            <a:schemeClr val="accent1"/>
+          </a:fillRef>
+          <a:effectRef idx="0">
+            <a:schemeClr val="accent1"/>
+          </a:effectRef>
+          <a:fontRef idx="minor">
+            <a:schemeClr val="lt1"/>
+          </a:fontRef>
+        </p:style>
+        <p:txBody>
+          <a:bodyPr rtlCol="0" anchor="ctr"/>
+          <a:lstStyle/>
+          <a:p>
+            <a:pPr algn="ctr"/>
+            <a:endParaRPr lang="en-US"/>
+          </a:p>
+        </p:txBody>
+      </p:sp>
+      <p:sp>
+        <p:nvSpPr>
+          <p:cNvPr id="5" name="Text Placeholder 4">
+            <a:extLst>
+              <a:ext uri="{FF2B5EF4-FFF2-40B4-BE49-F238E27FC236}">
+                <a16:creationId xmlns:a16="http://schemas.microsoft.com/office/drawing/2014/main" id="{9206C948-F919-7BC8-A53F-45E17F96D37F}"/>
+              </a:ext>
+            </a:extLst>
+          </p:cNvPr>
+          <p:cNvSpPr>
+            <a:spLocks noGrp="1"/>
+          </p:cNvSpPr>
+          <p:nvPr>
+            <p:ph type="body" idx="1"/>
+          </p:nvPr>
+        </p:nvSpPr>
+        <p:spPr>
+          <a:xfrm>
+            <a:off x="303414" y="5624945"/>
+            <a:ext cx="6935586" cy="592975"/>
+          </a:xfrm>
+        </p:spPr>
+        <p:txBody>
+          <a:bodyPr vert="horz" lIns="91440" tIns="45720" rIns="91440" bIns="45720" rtlCol="0" anchor="ctr">
+            <a:normAutofit/>
+          </a:bodyPr>
+          <a:lstStyle/>
+          <a:p>
+            <a:pPr defTabSz="914400">
+              <a:spcBef>
+                <a:spcPts val="1000"/>
+              </a:spcBef>
+            </a:pPr>
+            <a:r>
+              <a:rPr lang="en-US" sz="2400" b="1" dirty="0">
+                <a:solidFill>
+                  <a:schemeClr val="bg1"/>
+                </a:solidFill>
+              </a:rPr>
+              <a:t>Estimating conditional probability distributions</a:t>
+            </a:r>
+          </a:p>
+        </p:txBody>
+      </p:sp>
+    </p:spTree>
+    <p:extLst>
+      <p:ext uri="{BB962C8B-B14F-4D97-AF65-F5344CB8AC3E}">
+        <p14:creationId xmlns:p14="http://schemas.microsoft.com/office/powerpoint/2010/main" val="3277336210"/>
+      </p:ext>
+    </p:extLst>
+  </p:cSld>
+  <p:clrMapOvr>
+    <a:masterClrMapping/>
+  </p:clrMapOvr>
+</p:sld>
+</file>
+
 <file path=ppt/slides/slide4.xml><?xml version="1.0" encoding="utf-8"?>
 <p:sld xmlns:a="http://schemas.openxmlformats.org/drawingml/2006/main" xmlns:r="http://schemas.openxmlformats.org/officeDocument/2006/relationships" xmlns:p="http://schemas.openxmlformats.org/presentationml/2006/main">
   <p:cSld>
@@ -37983,114 +38281,6 @@
   <p:cSld>
     <p:spTree>
       <p:nvGrpSpPr>
-        <p:cNvPr id="1" name="">
-          <a:extLst>
-            <a:ext uri="{FF2B5EF4-FFF2-40B4-BE49-F238E27FC236}">
-              <a16:creationId xmlns:a16="http://schemas.microsoft.com/office/drawing/2014/main" id="{4A4F1D80-69E7-F100-E481-E549C595D03F}"/>
-            </a:ext>
-          </a:extLst>
-        </p:cNvPr>
-        <p:cNvGrpSpPr/>
-        <p:nvPr/>
-      </p:nvGrpSpPr>
-      <p:grpSpPr>
-        <a:xfrm>
-          <a:off x="0" y="0"/>
-          <a:ext cx="0" cy="0"/>
-          <a:chOff x="0" y="0"/>
-          <a:chExt cx="0" cy="0"/>
-        </a:xfrm>
-      </p:grpSpPr>
-      <p:sp>
-        <p:nvSpPr>
-          <p:cNvPr id="4" name="Title 3">
-            <a:extLst>
-              <a:ext uri="{FF2B5EF4-FFF2-40B4-BE49-F238E27FC236}">
-                <a16:creationId xmlns:a16="http://schemas.microsoft.com/office/drawing/2014/main" id="{514E567D-5B13-2B71-5511-B574C0DA809A}"/>
-              </a:ext>
-            </a:extLst>
-          </p:cNvPr>
-          <p:cNvSpPr>
-            <a:spLocks noGrp="1"/>
-          </p:cNvSpPr>
-          <p:nvPr>
-            <p:ph type="title"/>
-          </p:nvPr>
-        </p:nvSpPr>
-        <p:spPr/>
-        <p:txBody>
-          <a:bodyPr>
-            <a:normAutofit/>
-          </a:bodyPr>
-          <a:lstStyle/>
-          <a:p>
-            <a:r>
-              <a:rPr lang="en-US" sz="4000" dirty="0"/>
-              <a:t>Estimating </a:t>
-            </a:r>
-            <a:br>
-              <a:rPr lang="en-US" sz="4000" dirty="0"/>
-            </a:br>
-            <a:r>
-              <a:rPr lang="en-US" sz="4000" b="1" dirty="0"/>
-              <a:t>Conditional Probability Distributions </a:t>
-            </a:r>
-            <a:br>
-              <a:rPr lang="en-US" sz="4000" dirty="0"/>
-            </a:br>
-            <a:r>
-              <a:rPr lang="en-US" sz="4000" dirty="0"/>
-              <a:t>from BNs</a:t>
-            </a:r>
-          </a:p>
-        </p:txBody>
-      </p:sp>
-      <p:sp>
-        <p:nvSpPr>
-          <p:cNvPr id="5" name="Text Placeholder 4">
-            <a:extLst>
-              <a:ext uri="{FF2B5EF4-FFF2-40B4-BE49-F238E27FC236}">
-                <a16:creationId xmlns:a16="http://schemas.microsoft.com/office/drawing/2014/main" id="{8870DFCB-1794-B707-9C01-FED592346816}"/>
-              </a:ext>
-            </a:extLst>
-          </p:cNvPr>
-          <p:cNvSpPr>
-            <a:spLocks noGrp="1"/>
-          </p:cNvSpPr>
-          <p:nvPr>
-            <p:ph type="body" idx="1"/>
-          </p:nvPr>
-        </p:nvSpPr>
-        <p:spPr/>
-        <p:txBody>
-          <a:bodyPr/>
-          <a:lstStyle/>
-          <a:p>
-            <a:r>
-              <a:rPr lang="en-US" dirty="0"/>
-              <a:t>Estimate posterior probabilities for decision making </a:t>
-            </a:r>
-          </a:p>
-        </p:txBody>
-      </p:sp>
-    </p:spTree>
-    <p:extLst>
-      <p:ext uri="{BB962C8B-B14F-4D97-AF65-F5344CB8AC3E}">
-        <p14:creationId xmlns:p14="http://schemas.microsoft.com/office/powerpoint/2010/main" val="2370319908"/>
-      </p:ext>
-    </p:extLst>
-  </p:cSld>
-  <p:clrMapOvr>
-    <a:masterClrMapping/>
-  </p:clrMapOvr>
-</p:sld>
-</file>
-
-<file path=ppt/slides/slide41.xml><?xml version="1.0" encoding="utf-8"?>
-<p:sld xmlns:a="http://schemas.openxmlformats.org/drawingml/2006/main" xmlns:r="http://schemas.openxmlformats.org/officeDocument/2006/relationships" xmlns:p="http://schemas.openxmlformats.org/presentationml/2006/main">
-  <p:cSld>
-    <p:spTree>
-      <p:nvGrpSpPr>
         <p:cNvPr id="1" name=""/>
         <p:cNvGrpSpPr/>
         <p:nvPr/>
@@ -38172,8 +38362,8 @@
           </a:p>
         </p:txBody>
       </p:sp>
-      <mc:AlternateContent xmlns:mc="http://schemas.openxmlformats.org/markup-compatibility/2006">
-        <mc:Choice xmlns:a14="http://schemas.microsoft.com/office/drawing/2010/main" Requires="a14">
+      <mc:AlternateContent xmlns:mc="http://schemas.openxmlformats.org/markup-compatibility/2006" xmlns:a14="http://schemas.microsoft.com/office/drawing/2010/main">
+        <mc:Choice Requires="a14">
           <p:sp>
             <p:nvSpPr>
               <p:cNvPr id="3" name="Content Placeholder 2"/>
@@ -38578,7 +38768,7 @@
             </p:txBody>
           </p:sp>
         </mc:Choice>
-        <mc:Fallback>
+        <mc:Fallback xmlns="">
           <p:sp>
             <p:nvSpPr>
               <p:cNvPr id="3" name="Content Placeholder 2"/>
@@ -38837,8 +39027,8 @@
           </p:cxnSp>
         </p:grpSp>
       </p:grpSp>
-      <mc:AlternateContent xmlns:mc="http://schemas.openxmlformats.org/markup-compatibility/2006">
-        <mc:Choice xmlns:a14="http://schemas.microsoft.com/office/drawing/2010/main" Requires="a14">
+      <mc:AlternateContent xmlns:mc="http://schemas.openxmlformats.org/markup-compatibility/2006" xmlns:a14="http://schemas.microsoft.com/office/drawing/2010/main">
+        <mc:Choice Requires="a14">
           <p:sp>
             <p:nvSpPr>
               <p:cNvPr id="12" name="TextBox 11">
@@ -38939,7 +39129,7 @@
             </p:txBody>
           </p:sp>
         </mc:Choice>
-        <mc:Fallback>
+        <mc:Fallback xmlns="">
           <p:sp>
             <p:nvSpPr>
               <p:cNvPr id="12" name="TextBox 11">
@@ -39248,7 +39438,7 @@
 </p:sld>
 </file>
 
-<file path=ppt/slides/slide42.xml><?xml version="1.0" encoding="utf-8"?>
+<file path=ppt/slides/slide41.xml><?xml version="1.0" encoding="utf-8"?>
 <p:sld xmlns:a="http://schemas.openxmlformats.org/drawingml/2006/main" xmlns:r="http://schemas.openxmlformats.org/officeDocument/2006/relationships" xmlns:p="http://schemas.openxmlformats.org/presentationml/2006/main">
   <p:cSld>
     <p:spTree>
@@ -39425,7 +39615,7 @@
 </p:sld>
 </file>
 
-<file path=ppt/slides/slide43.xml><?xml version="1.0" encoding="utf-8"?>
+<file path=ppt/slides/slide42.xml><?xml version="1.0" encoding="utf-8"?>
 <p:sld xmlns:a="http://schemas.openxmlformats.org/drawingml/2006/main" xmlns:r="http://schemas.openxmlformats.org/officeDocument/2006/relationships" xmlns:p="http://schemas.openxmlformats.org/presentationml/2006/main">
   <p:cSld>
     <p:spTree>
@@ -40946,7 +41136,7 @@
 </p:sld>
 </file>
 
-<file path=ppt/slides/slide44.xml><?xml version="1.0" encoding="utf-8"?>
+<file path=ppt/slides/slide43.xml><?xml version="1.0" encoding="utf-8"?>
 <p:sld xmlns:a="http://schemas.openxmlformats.org/drawingml/2006/main" xmlns:r="http://schemas.openxmlformats.org/officeDocument/2006/relationships" xmlns:p="http://schemas.openxmlformats.org/presentationml/2006/main">
   <p:cSld>
     <p:bg>
@@ -41348,7 +41538,7 @@
 </p:sld>
 </file>
 
-<file path=ppt/slides/slide45.xml><?xml version="1.0" encoding="utf-8"?>
+<file path=ppt/slides/slide44.xml><?xml version="1.0" encoding="utf-8"?>
 <p:sld xmlns:a="http://schemas.openxmlformats.org/drawingml/2006/main" xmlns:r="http://schemas.openxmlformats.org/officeDocument/2006/relationships" xmlns:p="http://schemas.openxmlformats.org/presentationml/2006/main">
   <p:cSld>
     <p:spTree>
@@ -41958,7 +42148,7 @@
 </p:sld>
 </file>
 
-<file path=ppt/slides/slide46.xml><?xml version="1.0" encoding="utf-8"?>
+<file path=ppt/slides/slide45.xml><?xml version="1.0" encoding="utf-8"?>
 <p:sld xmlns:a="http://schemas.openxmlformats.org/drawingml/2006/main" xmlns:r="http://schemas.openxmlformats.org/officeDocument/2006/relationships" xmlns:p="http://schemas.openxmlformats.org/presentationml/2006/main">
   <p:cSld>
     <p:spTree>
@@ -42854,7 +43044,7 @@
 </p:sld>
 </file>
 
-<file path=ppt/slides/slide47.xml><?xml version="1.0" encoding="utf-8"?>
+<file path=ppt/slides/slide46.xml><?xml version="1.0" encoding="utf-8"?>
 <p:sld xmlns:a="http://schemas.openxmlformats.org/drawingml/2006/main" xmlns:r="http://schemas.openxmlformats.org/officeDocument/2006/relationships" xmlns:p="http://schemas.openxmlformats.org/presentationml/2006/main">
   <p:cSld>
     <p:spTree>
@@ -42904,8 +43094,8 @@
           </a:p>
         </p:txBody>
       </p:sp>
-      <mc:AlternateContent xmlns:mc="http://schemas.openxmlformats.org/markup-compatibility/2006">
-        <mc:Choice xmlns:a14="http://schemas.microsoft.com/office/drawing/2010/main" Requires="a14">
+      <mc:AlternateContent xmlns:mc="http://schemas.openxmlformats.org/markup-compatibility/2006" xmlns:a14="http://schemas.microsoft.com/office/drawing/2010/main">
+        <mc:Choice Requires="a14">
           <p:sp>
             <p:nvSpPr>
               <p:cNvPr id="3" name="Content Placeholder 2">
@@ -43516,7 +43706,7 @@
             </p:txBody>
           </p:sp>
         </mc:Choice>
-        <mc:Fallback>
+        <mc:Fallback xmlns="">
           <p:sp>
             <p:nvSpPr>
               <p:cNvPr id="3" name="Content Placeholder 2">
@@ -44630,7 +44820,7 @@
 </p:sld>
 </file>
 
-<file path=ppt/slides/slide48.xml><?xml version="1.0" encoding="utf-8"?>
+<file path=ppt/slides/slide47.xml><?xml version="1.0" encoding="utf-8"?>
 <p:sld xmlns:a="http://schemas.openxmlformats.org/drawingml/2006/main" xmlns:r="http://schemas.openxmlformats.org/officeDocument/2006/relationships" xmlns:p="http://schemas.openxmlformats.org/presentationml/2006/main">
   <p:cSld>
     <p:bg>
@@ -45207,7 +45397,7 @@
         <p:spPr>
           <a:xfrm>
             <a:off x="630936" y="251312"/>
-            <a:ext cx="7879842" cy="1010264"/>
+            <a:ext cx="3483864" cy="960417"/>
           </a:xfrm>
         </p:spPr>
         <p:txBody>
@@ -45220,14 +45410,6 @@
               <a:rPr lang="en-US" dirty="0"/>
               <a:t>Bayesian Networks</a:t>
             </a:r>
-            <a:br>
-              <a:rPr lang="en-US" dirty="0"/>
-            </a:br>
-            <a:r>
-              <a:rPr lang="en-US" sz="2800" dirty="0"/>
-              <a:t>(aka Belief Networks)</a:t>
-            </a:r>
-            <a:endParaRPr lang="en-US" dirty="0"/>
           </a:p>
         </p:txBody>
       </p:sp>
@@ -45571,6 +45753,71 @@
           </p:style>
         </p:cxnSp>
       </p:grpSp>
+      <p:sp>
+        <p:nvSpPr>
+          <p:cNvPr id="2" name="TextBox 1">
+            <a:extLst>
+              <a:ext uri="{FF2B5EF4-FFF2-40B4-BE49-F238E27FC236}">
+                <a16:creationId xmlns:a16="http://schemas.microsoft.com/office/drawing/2014/main" id="{889191FB-C611-D3DD-D75B-7ED08ECB6739}"/>
+              </a:ext>
+            </a:extLst>
+          </p:cNvPr>
+          <p:cNvSpPr txBox="1"/>
+          <p:nvPr/>
+        </p:nvSpPr>
+        <p:spPr>
+          <a:xfrm>
+            <a:off x="685800" y="1304108"/>
+            <a:ext cx="4114800" cy="1200329"/>
+          </a:xfrm>
+          <a:prstGeom prst="rect">
+            <a:avLst/>
+          </a:prstGeom>
+          <a:noFill/>
+        </p:spPr>
+        <p:txBody>
+          <a:bodyPr wrap="square" rtlCol="0">
+            <a:spAutoFit/>
+          </a:bodyPr>
+          <a:lstStyle/>
+          <a:p>
+            <a:r>
+              <a:rPr lang="en-US" dirty="0"/>
+              <a:t>Alternative common names:</a:t>
+            </a:r>
+          </a:p>
+          <a:p>
+            <a:pPr marL="285750" indent="-285750">
+              <a:buFont typeface="Arial" panose="020B0604020202020204" pitchFamily="34" charset="0"/>
+              <a:buChar char="•"/>
+            </a:pPr>
+            <a:r>
+              <a:rPr lang="en-US" dirty="0"/>
+              <a:t>Bayes Nets</a:t>
+            </a:r>
+          </a:p>
+          <a:p>
+            <a:pPr marL="285750" indent="-285750">
+              <a:buFont typeface="Arial" panose="020B0604020202020204" pitchFamily="34" charset="0"/>
+              <a:buChar char="•"/>
+            </a:pPr>
+            <a:r>
+              <a:rPr lang="en-US" dirty="0"/>
+              <a:t>Belief Networks</a:t>
+            </a:r>
+          </a:p>
+          <a:p>
+            <a:pPr marL="285750" indent="-285750">
+              <a:buFont typeface="Arial" panose="020B0604020202020204" pitchFamily="34" charset="0"/>
+              <a:buChar char="•"/>
+            </a:pPr>
+            <a:r>
+              <a:rPr lang="en-US" dirty="0"/>
+              <a:t>Causal Networks</a:t>
+            </a:r>
+          </a:p>
+        </p:txBody>
+      </p:sp>
     </p:spTree>
   </p:cSld>
   <p:clrMapOvr>
